--- a/slide/FINAL [jan_2026] thesis proposal slide (PPT) v.3.pptx
+++ b/slide/FINAL [jan_2026] thesis proposal slide (PPT) v.3.pptx
@@ -13285,434 +13285,6 @@
       </p:grpSpPr>
       <p:sp>
         <p:nvSpPr>
-          <p:cNvPr id="163" name="Google Shape;163;p12"/>
-          <p:cNvSpPr txBox="1"/>
-          <p:nvPr/>
-        </p:nvSpPr>
-        <p:spPr>
-          <a:xfrm>
-            <a:off x="418025" y="468350"/>
-            <a:ext cx="2900700" cy="538800"/>
-          </a:xfrm>
-          <a:prstGeom prst="rect">
-            <a:avLst/>
-          </a:prstGeom>
-          <a:noFill/>
-          <a:ln>
-            <a:noFill/>
-          </a:ln>
-        </p:spPr>
-        <p:txBody>
-          <a:bodyPr anchorCtr="0" anchor="t" bIns="91425" lIns="91425" spcFirstLastPara="1" rIns="91425" wrap="square" tIns="91425">
-            <a:spAutoFit/>
-          </a:bodyPr>
-          <a:lstStyle/>
-          <a:p>
-            <a:pPr indent="0" lvl="0" marL="0" marR="0" rtl="0" algn="l">
-              <a:lnSpc>
-                <a:spcPct val="100000"/>
-              </a:lnSpc>
-              <a:spcBef>
-                <a:spcPts val="0"/>
-              </a:spcBef>
-              <a:spcAft>
-                <a:spcPts val="0"/>
-              </a:spcAft>
-              <a:buClr>
-                <a:srgbClr val="000000"/>
-              </a:buClr>
-              <a:buSzPts val="2300"/>
-              <a:buFont typeface="Arial"/>
-              <a:buNone/>
-            </a:pPr>
-            <a:r>
-              <a:rPr b="1" i="0" lang="en" sz="2300" u="none" cap="none" strike="noStrike">
-                <a:solidFill>
-                  <a:srgbClr val="252827"/>
-                </a:solidFill>
-                <a:latin typeface="Oswald"/>
-                <a:ea typeface="Oswald"/>
-                <a:cs typeface="Oswald"/>
-                <a:sym typeface="Oswald"/>
-              </a:rPr>
-              <a:t>2. RELATED WORK</a:t>
-            </a:r>
-            <a:endParaRPr b="1" i="0" sz="2300" u="none" cap="none" strike="noStrike">
-              <a:solidFill>
-                <a:srgbClr val="F8CF2C"/>
-              </a:solidFill>
-              <a:latin typeface="Oswald"/>
-              <a:ea typeface="Oswald"/>
-              <a:cs typeface="Oswald"/>
-              <a:sym typeface="Oswald"/>
-            </a:endParaRPr>
-          </a:p>
-        </p:txBody>
-      </p:sp>
-      <p:sp>
-        <p:nvSpPr>
-          <p:cNvPr id="164" name="Google Shape;164;p12"/>
-          <p:cNvSpPr txBox="1"/>
-          <p:nvPr/>
-        </p:nvSpPr>
-        <p:spPr>
-          <a:xfrm>
-            <a:off x="510450" y="1287400"/>
-            <a:ext cx="8367300" cy="2649900"/>
-          </a:xfrm>
-          <a:prstGeom prst="rect">
-            <a:avLst/>
-          </a:prstGeom>
-          <a:noFill/>
-          <a:ln>
-            <a:noFill/>
-          </a:ln>
-        </p:spPr>
-        <p:txBody>
-          <a:bodyPr anchorCtr="0" anchor="t" bIns="91425" lIns="91425" spcFirstLastPara="1" rIns="91425" wrap="square" tIns="91425">
-            <a:spAutoFit/>
-          </a:bodyPr>
-          <a:lstStyle/>
-          <a:p>
-            <a:pPr indent="0" lvl="0" marL="0" marR="0" rtl="0" algn="l">
-              <a:lnSpc>
-                <a:spcPct val="115000"/>
-              </a:lnSpc>
-              <a:spcBef>
-                <a:spcPts val="1200"/>
-              </a:spcBef>
-              <a:spcAft>
-                <a:spcPts val="0"/>
-              </a:spcAft>
-              <a:buClr>
-                <a:srgbClr val="000000"/>
-              </a:buClr>
-              <a:buSzPts val="1100"/>
-              <a:buFont typeface="Arial"/>
-              <a:buNone/>
-            </a:pPr>
-            <a:r>
-              <a:rPr b="1" i="0" lang="en" sz="1100" u="none" cap="none" strike="noStrike">
-                <a:solidFill>
-                  <a:schemeClr val="dk1"/>
-                </a:solidFill>
-                <a:latin typeface="Arial"/>
-                <a:ea typeface="Arial"/>
-                <a:cs typeface="Arial"/>
-                <a:sym typeface="Arial"/>
-              </a:rPr>
-              <a:t>Voice Modeling for Therapeutic Intervention</a:t>
-            </a:r>
-            <a:endParaRPr b="1" i="0" sz="1100" u="none" cap="none" strike="noStrike">
-              <a:solidFill>
-                <a:schemeClr val="dk1"/>
-              </a:solidFill>
-              <a:latin typeface="Arial"/>
-              <a:ea typeface="Arial"/>
-              <a:cs typeface="Arial"/>
-              <a:sym typeface="Arial"/>
-            </a:endParaRPr>
-          </a:p>
-          <a:p>
-            <a:pPr indent="-298450" lvl="0" marL="457200" marR="0" rtl="0" algn="l">
-              <a:lnSpc>
-                <a:spcPct val="115000"/>
-              </a:lnSpc>
-              <a:spcBef>
-                <a:spcPts val="1200"/>
-              </a:spcBef>
-              <a:spcAft>
-                <a:spcPts val="0"/>
-              </a:spcAft>
-              <a:buClr>
-                <a:schemeClr val="dk1"/>
-              </a:buClr>
-              <a:buSzPts val="1100"/>
-              <a:buFont typeface="Arial"/>
-              <a:buChar char="●"/>
-            </a:pPr>
-            <a:r>
-              <a:rPr b="1" i="0" lang="en" sz="1100" u="none" cap="none" strike="noStrike">
-                <a:solidFill>
-                  <a:schemeClr val="dk1"/>
-                </a:solidFill>
-                <a:latin typeface="Arial"/>
-                <a:ea typeface="Arial"/>
-                <a:cs typeface="Arial"/>
-                <a:sym typeface="Arial"/>
-              </a:rPr>
-              <a:t>Existing Work:</a:t>
-            </a:r>
-            <a:endParaRPr b="1" i="0" sz="1100" u="none" cap="none" strike="noStrike">
-              <a:solidFill>
-                <a:schemeClr val="dk1"/>
-              </a:solidFill>
-              <a:latin typeface="Arial"/>
-              <a:ea typeface="Arial"/>
-              <a:cs typeface="Arial"/>
-              <a:sym typeface="Arial"/>
-            </a:endParaRPr>
-          </a:p>
-          <a:p>
-            <a:pPr indent="-298450" lvl="1" marL="914400" marR="0" rtl="0" algn="l">
-              <a:lnSpc>
-                <a:spcPct val="115000"/>
-              </a:lnSpc>
-              <a:spcBef>
-                <a:spcPts val="0"/>
-              </a:spcBef>
-              <a:spcAft>
-                <a:spcPts val="0"/>
-              </a:spcAft>
-              <a:buClr>
-                <a:schemeClr val="dk1"/>
-              </a:buClr>
-              <a:buSzPts val="1100"/>
-              <a:buFont typeface="Arial"/>
-              <a:buChar char="○"/>
-            </a:pPr>
-            <a:r>
-              <a:rPr b="0" i="0" lang="en" sz="1100" u="none" cap="none" strike="noStrike">
-                <a:solidFill>
-                  <a:schemeClr val="dk1"/>
-                </a:solidFill>
-                <a:latin typeface="Arial"/>
-                <a:ea typeface="Arial"/>
-                <a:cs typeface="Arial"/>
-                <a:sym typeface="Arial"/>
-              </a:rPr>
-              <a:t>The feasibility of our proposed intervention relies on recent advancements in </a:t>
-            </a:r>
-            <a:r>
-              <a:rPr b="1" i="0" lang="en" sz="1100" u="none" cap="none" strike="noStrike">
-                <a:solidFill>
-                  <a:schemeClr val="dk1"/>
-                </a:solidFill>
-                <a:latin typeface="Arial"/>
-                <a:ea typeface="Arial"/>
-                <a:cs typeface="Arial"/>
-                <a:sym typeface="Arial"/>
-              </a:rPr>
-              <a:t>Controllable and Expressive Text-to-Speech (TTS) synthesis</a:t>
-            </a:r>
-            <a:r>
-              <a:rPr b="0" i="0" lang="en" sz="1100" u="none" cap="none" strike="noStrike">
-                <a:solidFill>
-                  <a:schemeClr val="dk1"/>
-                </a:solidFill>
-                <a:latin typeface="Arial"/>
-                <a:ea typeface="Arial"/>
-                <a:cs typeface="Arial"/>
-                <a:sym typeface="Arial"/>
-              </a:rPr>
-              <a:t>. State-of-the-art models have demonstrated the ability to clone a speaker's voice and generate highly realistic, human-like speech.</a:t>
-            </a:r>
-            <a:endParaRPr b="0" i="0" sz="1100" u="none" cap="none" strike="noStrike">
-              <a:solidFill>
-                <a:schemeClr val="dk1"/>
-              </a:solidFill>
-              <a:latin typeface="Arial"/>
-              <a:ea typeface="Arial"/>
-              <a:cs typeface="Arial"/>
-              <a:sym typeface="Arial"/>
-            </a:endParaRPr>
-          </a:p>
-          <a:p>
-            <a:pPr indent="-298450" lvl="1" marL="914400" marR="0" rtl="0" algn="l">
-              <a:lnSpc>
-                <a:spcPct val="115000"/>
-              </a:lnSpc>
-              <a:spcBef>
-                <a:spcPts val="0"/>
-              </a:spcBef>
-              <a:spcAft>
-                <a:spcPts val="0"/>
-              </a:spcAft>
-              <a:buClr>
-                <a:schemeClr val="dk1"/>
-              </a:buClr>
-              <a:buSzPts val="1100"/>
-              <a:buFont typeface="Arial"/>
-              <a:buChar char="○"/>
-            </a:pPr>
-            <a:r>
-              <a:rPr b="0" i="0" lang="en" sz="1100" u="none" cap="none" strike="noStrike">
-                <a:solidFill>
-                  <a:schemeClr val="dk1"/>
-                </a:solidFill>
-                <a:latin typeface="Arial"/>
-                <a:ea typeface="Arial"/>
-                <a:cs typeface="Arial"/>
-                <a:sym typeface="Arial"/>
-              </a:rPr>
-              <a:t>Furthermore, research by </a:t>
-            </a:r>
-            <a:r>
-              <a:rPr b="1" i="0" lang="en" sz="1100" u="none" cap="none" strike="noStrike">
-                <a:solidFill>
-                  <a:schemeClr val="dk1"/>
-                </a:solidFill>
-                <a:latin typeface="Arial"/>
-                <a:ea typeface="Arial"/>
-                <a:cs typeface="Arial"/>
-                <a:sym typeface="Arial"/>
-              </a:rPr>
-              <a:t>Reza et al. (2024)</a:t>
-            </a:r>
-            <a:r>
-              <a:rPr b="0" i="0" lang="en" sz="1100" u="none" cap="none" strike="noStrike">
-                <a:solidFill>
-                  <a:schemeClr val="dk1"/>
-                </a:solidFill>
-                <a:latin typeface="Arial"/>
-                <a:ea typeface="Arial"/>
-                <a:cs typeface="Arial"/>
-                <a:sym typeface="Arial"/>
-              </a:rPr>
-              <a:t> confirms that acoustic features are strongly correlated with speaker demographics, underscoring the necessity of demographic diversity for creating realistic training data.</a:t>
-            </a:r>
-            <a:endParaRPr b="0" i="0" sz="1100" u="none" cap="none" strike="noStrike">
-              <a:solidFill>
-                <a:schemeClr val="dk1"/>
-              </a:solidFill>
-              <a:latin typeface="Arial"/>
-              <a:ea typeface="Arial"/>
-              <a:cs typeface="Arial"/>
-              <a:sym typeface="Arial"/>
-            </a:endParaRPr>
-          </a:p>
-          <a:p>
-            <a:pPr indent="-298450" lvl="0" marL="457200" marR="0" rtl="0" algn="l">
-              <a:lnSpc>
-                <a:spcPct val="115000"/>
-              </a:lnSpc>
-              <a:spcBef>
-                <a:spcPts val="0"/>
-              </a:spcBef>
-              <a:spcAft>
-                <a:spcPts val="0"/>
-              </a:spcAft>
-              <a:buClr>
-                <a:schemeClr val="dk1"/>
-              </a:buClr>
-              <a:buSzPts val="1100"/>
-              <a:buFont typeface="Arial"/>
-              <a:buChar char="●"/>
-            </a:pPr>
-            <a:r>
-              <a:rPr b="1" i="0" lang="en" sz="1100" u="none" cap="none" strike="noStrike">
-                <a:solidFill>
-                  <a:schemeClr val="dk1"/>
-                </a:solidFill>
-                <a:latin typeface="Arial"/>
-                <a:ea typeface="Arial"/>
-                <a:cs typeface="Arial"/>
-                <a:sym typeface="Arial"/>
-              </a:rPr>
-              <a:t>Research Gap &amp; Our Contribution:</a:t>
-            </a:r>
-            <a:endParaRPr b="0" i="0" sz="1100" u="none" cap="none" strike="noStrike">
-              <a:solidFill>
-                <a:schemeClr val="dk1"/>
-              </a:solidFill>
-              <a:latin typeface="Arial"/>
-              <a:ea typeface="Arial"/>
-              <a:cs typeface="Arial"/>
-              <a:sym typeface="Arial"/>
-            </a:endParaRPr>
-          </a:p>
-          <a:p>
-            <a:pPr indent="-298450" lvl="1" marL="914400" marR="0" rtl="0" algn="l">
-              <a:lnSpc>
-                <a:spcPct val="115000"/>
-              </a:lnSpc>
-              <a:spcBef>
-                <a:spcPts val="0"/>
-              </a:spcBef>
-              <a:spcAft>
-                <a:spcPts val="0"/>
-              </a:spcAft>
-              <a:buClr>
-                <a:schemeClr val="dk1"/>
-              </a:buClr>
-              <a:buSzPts val="1100"/>
-              <a:buFont typeface="Arial"/>
-              <a:buChar char="○"/>
-            </a:pPr>
-            <a:r>
-              <a:rPr b="0" i="0" lang="en" sz="1100" u="none" cap="none" strike="noStrike">
-                <a:solidFill>
-                  <a:schemeClr val="dk1"/>
-                </a:solidFill>
-                <a:latin typeface="Arial"/>
-                <a:ea typeface="Arial"/>
-                <a:cs typeface="Arial"/>
-                <a:sym typeface="Arial"/>
-              </a:rPr>
-              <a:t>The application of these models in a therapeutic context is under-explored. Our research investigates using this technology not just to create realistic speech, but to generate a </a:t>
-            </a:r>
-            <a:r>
-              <a:rPr b="1" i="0" lang="en" sz="1100" u="none" cap="none" strike="noStrike">
-                <a:solidFill>
-                  <a:schemeClr val="dk1"/>
-                </a:solidFill>
-                <a:latin typeface="Arial"/>
-                <a:ea typeface="Arial"/>
-                <a:cs typeface="Arial"/>
-                <a:sym typeface="Arial"/>
-              </a:rPr>
-              <a:t>demographically diverse set of voices</a:t>
-            </a:r>
-            <a:r>
-              <a:rPr b="0" i="0" lang="en" sz="1100" u="none" cap="none" strike="noStrike">
-                <a:solidFill>
-                  <a:schemeClr val="dk1"/>
-                </a:solidFill>
-                <a:latin typeface="Arial"/>
-                <a:ea typeface="Arial"/>
-                <a:cs typeface="Arial"/>
-                <a:sym typeface="Arial"/>
-              </a:rPr>
-              <a:t> and control their </a:t>
-            </a:r>
-            <a:r>
-              <a:rPr b="1" i="0" lang="en" sz="1100" u="none" cap="none" strike="noStrike">
-                <a:solidFill>
-                  <a:schemeClr val="dk1"/>
-                </a:solidFill>
-                <a:latin typeface="Arial"/>
-                <a:ea typeface="Arial"/>
-                <a:cs typeface="Arial"/>
-                <a:sym typeface="Arial"/>
-              </a:rPr>
-              <a:t>emotional expression</a:t>
-            </a:r>
-            <a:r>
-              <a:rPr b="0" i="0" lang="en" sz="1100" u="none" cap="none" strike="noStrike">
-                <a:solidFill>
-                  <a:schemeClr val="dk1"/>
-                </a:solidFill>
-                <a:latin typeface="Arial"/>
-                <a:ea typeface="Arial"/>
-                <a:cs typeface="Arial"/>
-                <a:sym typeface="Arial"/>
-              </a:rPr>
-              <a:t> in real-time to deliver empathetic and therapeutically appropriate vocal responses as a core part of the intervention loop.</a:t>
-            </a:r>
-            <a:endParaRPr b="1" i="0" sz="1100" u="none" cap="none" strike="noStrike">
-              <a:solidFill>
-                <a:schemeClr val="dk1"/>
-              </a:solidFill>
-              <a:latin typeface="Arial"/>
-              <a:ea typeface="Arial"/>
-              <a:cs typeface="Arial"/>
-              <a:sym typeface="Arial"/>
-            </a:endParaRPr>
-          </a:p>
-        </p:txBody>
-      </p:sp>
-      <p:sp>
-        <p:nvSpPr>
           <p:cNvPr id="165" name="Google Shape;165;p12"/>
           <p:cNvSpPr txBox="1"/>
           <p:nvPr>
@@ -13761,63 +13333,63 @@
       </p:sp>
       <p:sp>
         <p:nvSpPr>
-          <p:cNvPr id="166" name="Google Shape;166;p12"/>
-          <p:cNvSpPr/>
+          <p:cNvPr id="166" name="TextBox 165"/>
+          <p:cNvSpPr txBox="1"/>
           <p:nvPr/>
         </p:nvSpPr>
         <p:spPr>
           <a:xfrm>
-            <a:off x="510450" y="984075"/>
-            <a:ext cx="646800" cy="111300"/>
+            <a:off x="400000" y="100000"/>
+            <a:ext cx="8200000" cy="350000"/>
           </a:xfrm>
           <a:prstGeom prst="rect">
             <a:avLst/>
           </a:prstGeom>
-          <a:solidFill>
-            <a:srgbClr val="4BA8EB"/>
-          </a:solidFill>
-          <a:ln>
-            <a:noFill/>
-          </a:ln>
+          <a:noFill/>
         </p:spPr>
         <p:txBody>
-          <a:bodyPr anchorCtr="0" anchor="ctr" bIns="91425" lIns="91425" spcFirstLastPara="1" rIns="91425" wrap="square" tIns="91425">
-            <a:noAutofit/>
+          <a:bodyPr wrap="none">
+            <a:spAutoFit/>
           </a:bodyPr>
           <a:lstStyle/>
           <a:p>
-            <a:pPr indent="0" lvl="0" marL="0" marR="0" rtl="0" algn="l">
-              <a:lnSpc>
-                <a:spcPct val="100000"/>
-              </a:lnSpc>
-              <a:spcBef>
-                <a:spcPts val="0"/>
-              </a:spcBef>
-              <a:spcAft>
-                <a:spcPts val="0"/>
-              </a:spcAft>
-              <a:buClr>
-                <a:srgbClr val="000000"/>
-              </a:buClr>
-              <a:buSzPts val="1400"/>
-              <a:buFont typeface="Arial"/>
-              <a:buNone/>
-            </a:pPr>
-            <a:r>
-              <a:t/>
-            </a:r>
-            <a:endParaRPr b="0" i="0" sz="1400" u="none" cap="none" strike="noStrike">
-              <a:solidFill>
-                <a:srgbClr val="4BA8EB"/>
-              </a:solidFill>
-              <a:latin typeface="Arial"/>
-              <a:ea typeface="Arial"/>
-              <a:cs typeface="Arial"/>
-              <a:sym typeface="Arial"/>
-            </a:endParaRPr>
+            <a:pPr>
+              <a:defRPr sz="2200" b="1">
+                <a:solidFill>
+                  <a:srgbClr val="003366"/>
+                </a:solidFill>
+              </a:defRPr>
+            </a:pPr>
+            <a:r>
+              <a:t>3.5 FRAMEWORK: DATASET &amp; PREPROCESSING PIPELINE</a:t>
+            </a:r>
           </a:p>
         </p:txBody>
       </p:sp>
+      <p:pic>
+        <p:nvPicPr>
+          <p:cNvPr id="167" name="Picture 166" descr="framework_pipeline_slide.png"/>
+          <p:cNvPicPr>
+            <a:picLocks noChangeAspect="1"/>
+          </p:cNvPicPr>
+          <p:nvPr/>
+        </p:nvPicPr>
+        <p:blipFill>
+          <a:blip r:embed="rId3"/>
+          <a:stretch>
+            <a:fillRect/>
+          </a:stretch>
+        </p:blipFill>
+        <p:spPr>
+          <a:xfrm>
+            <a:off x="200000" y="500000"/>
+            <a:ext cx="8744000" cy="4450000"/>
+          </a:xfrm>
+          <a:prstGeom prst="rect">
+            <a:avLst/>
+          </a:prstGeom>
+        </p:spPr>
+      </p:pic>
     </p:spTree>
   </p:cSld>
   <p:clrMapOvr>
@@ -15197,7 +14769,7 @@
         <p:spPr>
           <a:xfrm>
             <a:off x="400000" y="520000"/>
-            <a:ext cx="8200000" cy="4400000"/>
+            <a:ext cx="8200000" cy="4500000"/>
           </a:xfrm>
           <a:prstGeom prst="rect">
             <a:avLst/>
@@ -15236,10 +14808,48 @@
               <a:spcAft>
                 <a:spcPts val="100"/>
               </a:spcAft>
+              <a:defRPr sz="400" b="0"/>
+            </a:pPr>
+          </a:p>
+          <a:p>
+            <a:pPr>
+              <a:spcAft>
+                <a:spcPts val="100"/>
+              </a:spcAft>
+              <a:defRPr sz="1600" b="1"/>
+            </a:pPr>
+            <a:r>
+              <a:t>2. The Pipeline:</a:t>
+            </a:r>
+          </a:p>
+          <a:p>
+            <a:pPr>
+              <a:spcAft>
+                <a:spcPts val="100"/>
+              </a:spcAft>
+              <a:defRPr sz="300" b="0"/>
+            </a:pPr>
+          </a:p>
+          <a:p>
+            <a:pPr>
+              <a:spcAft>
+                <a:spcPts val="100"/>
+              </a:spcAft>
+              <a:defRPr sz="1300" b="1"/>
+            </a:pPr>
+            <a:r>
+              <a:t>Step 1: Audio Segmentation</a:t>
+            </a:r>
+          </a:p>
+          <a:p>
+            <a:pPr>
+              <a:spcAft>
+                <a:spcPts val="100"/>
+              </a:spcAft>
               <a:defRPr sz="1100" b="0"/>
             </a:pPr>
             <a:r>
-              <a:t>Make unstructured audio understandable for the therapist generation pipeline.</a:t>
+              <a:t>  Utterance-level chunks using Zonos synthesis boundaries.</a:t>
             </a:r>
           </a:p>
           <a:p>
@@ -15247,7 +14857,7 @@
               <a:spcAft>
                 <a:spcPts val="100"/>
               </a:spcAft>
-              <a:defRPr sz="500" b="0"/>
+              <a:defRPr sz="300" b="0"/>
             </a:pPr>
           </a:p>
           <a:p>
@@ -15255,10 +14865,10 @@
               <a:spcAft>
                 <a:spcPts val="100"/>
               </a:spcAft>
-              <a:defRPr sz="1600" b="1"/>
-            </a:pPr>
-            <a:r>
-              <a:t>2. The Pipeline:</a:t>
+              <a:defRPr sz="1300" b="1"/>
+            </a:pPr>
+            <a:r>
+              <a:t>Step 2: Dual-Channel Emotion Extraction (vad-bert + WavLM + librosa)</a:t>
             </a:r>
           </a:p>
           <a:p>
@@ -15266,6 +14876,54 @@
               <a:spcAft>
                 <a:spcPts val="100"/>
               </a:spcAft>
+              <a:defRPr sz="1100" b="0"/>
+            </a:pPr>
+            <a:r>
+              <a:t>  Text VA (vad-bert): Valence &amp; Arousal from transcript</a:t>
+            </a:r>
+          </a:p>
+          <a:p>
+            <a:pPr>
+              <a:spcAft>
+                <a:spcPts val="100"/>
+              </a:spcAft>
+              <a:defRPr sz="1100" b="0"/>
+            </a:pPr>
+            <a:r>
+              <a:t>  Speech VA (WavLM): Valence &amp; Arousal from audio waveform</a:t>
+            </a:r>
+          </a:p>
+          <a:p>
+            <a:pPr>
+              <a:spcAft>
+                <a:spcPts val="100"/>
+              </a:spcAft>
+              <a:defRPr sz="1100" b="0"/>
+            </a:pPr>
+            <a:r>
+              <a:t>  Vocal Descriptors (librosa): Pitch, Loudness, Speaking Rate</a:t>
+            </a:r>
+          </a:p>
+          <a:p>
+            <a:pPr>
+              <a:spcAft>
+                <a:spcPts val="100"/>
+              </a:spcAft>
+              <a:defRPr sz="1000" b="0">
+                <a:solidFill>
+                  <a:srgbClr val="005000"/>
+                </a:solidFill>
+              </a:defRPr>
+            </a:pPr>
+            <a:r>
+              <a:t>    (ACTUAL audio: e.g. pitch: 180 Hz, RMS: 0.06, rate: 3.2 w/s)</a:t>
+            </a:r>
+          </a:p>
+          <a:p>
+            <a:pPr>
+              <a:spcAft>
+                <a:spcPts val="100"/>
+              </a:spcAft>
               <a:defRPr sz="300" b="0"/>
             </a:pPr>
           </a:p>
@@ -15277,7 +14935,7 @@
               <a:defRPr sz="1300" b="1"/>
             </a:pPr>
             <a:r>
-              <a:t>Step 1: Audio Segmentation</a:t>
+              <a:t>Step 3: Discrete Emotion Mapping (Russell, 1980 Circumplex Model)</a:t>
             </a:r>
           </a:p>
           <a:p>
@@ -15288,7 +14946,7 @@
               <a:defRPr sz="1100" b="0"/>
             </a:pPr>
             <a:r>
-              <a:t>  Segments audio into utterance-level chunks using Zonos synthesis boundaries.</a:t>
+              <a:t>  angle = atan2(A, V) -&gt; 9 labels: Happy, Excited, Tense, Angry, Sad,</a:t>
             </a:r>
           </a:p>
           <a:p>
@@ -15299,7 +14957,7 @@
               <a:defRPr sz="1100" b="0"/>
             </a:pPr>
             <a:r>
-              <a:t>  Isolates each client utterance for independent feature extraction.</a:t>
+              <a:t>  Depressed, Calm, Content, Neutral</a:t>
             </a:r>
           </a:p>
           <a:p>
@@ -15307,6 +14965,17 @@
               <a:spcAft>
                 <a:spcPts val="100"/>
               </a:spcAft>
+              <a:defRPr sz="1100" b="0"/>
+            </a:pPr>
+            <a:r>
+              <a:t>  Detects hidden affect: Text=Neutral vs Speech=Angry -&gt; emotion mismatch</a:t>
+            </a:r>
+          </a:p>
+          <a:p>
+            <a:pPr>
+              <a:spcAft>
+                <a:spcPts val="100"/>
+              </a:spcAft>
               <a:defRPr sz="300" b="0"/>
             </a:pPr>
           </a:p>
@@ -15318,7 +14987,7 @@
               <a:defRPr sz="1300" b="1"/>
             </a:pPr>
             <a:r>
-              <a:t>Step 2: Dual-Channel Emotion Extraction (vad-bert + WavLM + librosa)</a:t>
+              <a:t>Step 4: Dissonance Computation</a:t>
             </a:r>
           </a:p>
           <a:p>
@@ -15329,89 +14998,7 @@
               <a:defRPr sz="1100" b="0"/>
             </a:pPr>
             <a:r>
-              <a:t>  Text VA (vad-bert): Valence &amp; Arousal from transcript</a:t>
-            </a:r>
-          </a:p>
-          <a:p>
-            <a:pPr>
-              <a:spcAft>
-                <a:spcPts val="100"/>
-              </a:spcAft>
-              <a:defRPr sz="1100" b="0"/>
-            </a:pPr>
-            <a:r>
-              <a:t>  Speech VA (WavLM): Valence &amp; Arousal from audio waveform</a:t>
-            </a:r>
-          </a:p>
-          <a:p>
-            <a:pPr>
-              <a:spcAft>
-                <a:spcPts val="100"/>
-              </a:spcAft>
-              <a:defRPr sz="1100" b="0"/>
-            </a:pPr>
-            <a:r>
-              <a:t>  Vocal Descriptors (librosa): Pitch (F0), Loudness (RMS), Speaking Rate</a:t>
-            </a:r>
-          </a:p>
-          <a:p>
-            <a:pPr>
-              <a:spcAft>
-                <a:spcPts val="100"/>
-              </a:spcAft>
-              <a:defRPr sz="1000" b="0">
-                <a:solidFill>
-                  <a:srgbClr val="005000"/>
-                </a:solidFill>
-              </a:defRPr>
-            </a:pPr>
-            <a:r>
-              <a:t>    e.g. pitch: 180 Hz, RMS: 0.06, rate: 3.2 w/s (ACTUAL audio measurement)</a:t>
-            </a:r>
-          </a:p>
-          <a:p>
-            <a:pPr>
-              <a:spcAft>
-                <a:spcPts val="100"/>
-              </a:spcAft>
-              <a:defRPr sz="1000" b="0">
-                <a:solidFill>
-                  <a:srgbClr val="B40000"/>
-                </a:solidFill>
-              </a:defRPr>
-            </a:pPr>
-            <a:r>
-              <a:t>    NOT Zonos Director pre-synthesis targets (speaking_rate: 15, pitch_std: 100)</a:t>
-            </a:r>
-          </a:p>
-          <a:p>
-            <a:pPr>
-              <a:spcAft>
-                <a:spcPts val="100"/>
-              </a:spcAft>
-              <a:defRPr sz="300" b="0"/>
-            </a:pPr>
-          </a:p>
-          <a:p>
-            <a:pPr>
-              <a:spcAft>
-                <a:spcPts val="100"/>
-              </a:spcAft>
-              <a:defRPr sz="1300" b="1"/>
-            </a:pPr>
-            <a:r>
-              <a:t>Step 3: Dissonance Computation</a:t>
-            </a:r>
-          </a:p>
-          <a:p>
-            <a:pPr>
-              <a:spcAft>
-                <a:spcPts val="100"/>
-              </a:spcAft>
-              <a:defRPr sz="1100" b="0"/>
-            </a:pPr>
-            <a:r>
-              <a:t>  delta_V = V_speech - V_text,  delta_A = A_speech - A_text</a:t>
+              <a:t>  delta_V = V_speech - V_text, delta_A = A_speech - A_text</a:t>
             </a:r>
           </a:p>
           <a:p>
